--- a/sem_12_lib/presentations/sem_12_lib.pptx
+++ b/sem_12_lib/presentations/sem_12_lib.pptx
@@ -22,7 +22,8 @@
     <p:sldId id="270" r:id="rId16"/>
     <p:sldId id="271" r:id="rId17"/>
     <p:sldId id="272" r:id="rId18"/>
-    <p:sldId id="273" r:id="rId19"/>
+    <p:sldId id="274" r:id="rId19"/>
+    <p:sldId id="273" r:id="rId20"/>
   </p:sldIdLst>
   <p:sldSz cx="12192000" cy="6858000"/>
   <p:notesSz cx="6858000" cy="9144000"/>
@@ -4326,6 +4327,9 @@
           <a:bodyPr/>
           <a:lstStyle/>
           <a:p>
+            <a:pPr marL="0" indent="0">
+              <a:buNone/>
+            </a:pPr>
             <a:r>
               <a:rPr lang="en-US" dirty="0"/>
               <a:t>import </a:t>
@@ -4337,9 +4341,15 @@
             <a:endParaRPr lang="en-US" dirty="0"/>
           </a:p>
           <a:p>
+            <a:pPr marL="0" indent="0">
+              <a:buNone/>
+            </a:pPr>
             <a:endParaRPr lang="en-US" dirty="0"/>
           </a:p>
           <a:p>
+            <a:pPr marL="0" indent="0">
+              <a:buNone/>
+            </a:pPr>
             <a:r>
               <a:rPr lang="en-US" dirty="0"/>
               <a:t>dl = </a:t>
@@ -4354,6 +4364,9 @@
             </a:r>
           </a:p>
           <a:p>
+            <a:pPr marL="0" indent="0">
+              <a:buNone/>
+            </a:pPr>
             <a:r>
               <a:rPr lang="en-US" dirty="0" err="1"/>
               <a:t>dl.hello</a:t>
@@ -4684,6 +4697,236 @@
 </file>
 
 <file path=ppt/slides/slide18.xml><?xml version="1.0" encoding="utf-8"?>
+<p:sld xmlns:a="http://schemas.openxmlformats.org/drawingml/2006/main" xmlns:r="http://schemas.openxmlformats.org/officeDocument/2006/relationships" xmlns:p="http://schemas.openxmlformats.org/presentationml/2006/main">
+  <p:cSld>
+    <p:spTree>
+      <p:nvGrpSpPr>
+        <p:cNvPr id="1" name=""/>
+        <p:cNvGrpSpPr/>
+        <p:nvPr/>
+      </p:nvGrpSpPr>
+      <p:grpSpPr>
+        <a:xfrm>
+          <a:off x="0" y="0"/>
+          <a:ext cx="0" cy="0"/>
+          <a:chOff x="0" y="0"/>
+          <a:chExt cx="0" cy="0"/>
+        </a:xfrm>
+      </p:grpSpPr>
+      <p:sp>
+        <p:nvSpPr>
+          <p:cNvPr id="2" name="Title 1">
+            <a:extLst>
+              <a:ext uri="{FF2B5EF4-FFF2-40B4-BE49-F238E27FC236}">
+                <a16:creationId xmlns:a16="http://schemas.microsoft.com/office/drawing/2014/main" id="{2D626C08-D0BA-4FF8-82DC-0549C0AC474C}"/>
+              </a:ext>
+            </a:extLst>
+          </p:cNvPr>
+          <p:cNvSpPr>
+            <a:spLocks noGrp="1"/>
+          </p:cNvSpPr>
+          <p:nvPr>
+            <p:ph type="title"/>
+          </p:nvPr>
+        </p:nvSpPr>
+        <p:spPr/>
+        <p:txBody>
+          <a:bodyPr/>
+          <a:lstStyle/>
+          <a:p>
+            <a:r>
+              <a:rPr lang="ru-RU" dirty="0">
+                <a:latin typeface="Arial" panose="020B0604020202020204" pitchFamily="34" charset="0"/>
+                <a:cs typeface="Arial" panose="020B0604020202020204" pitchFamily="34" charset="0"/>
+              </a:rPr>
+              <a:t>Полезные </a:t>
+            </a:r>
+            <a:r>
+              <a:rPr lang="ru-RU" dirty="0" err="1">
+                <a:latin typeface="Arial" panose="020B0604020202020204" pitchFamily="34" charset="0"/>
+                <a:cs typeface="Arial" panose="020B0604020202020204" pitchFamily="34" charset="0"/>
+              </a:rPr>
+              <a:t>тулзы</a:t>
+            </a:r>
+            <a:endParaRPr lang="ru-RU" dirty="0">
+              <a:latin typeface="Arial" panose="020B0604020202020204" pitchFamily="34" charset="0"/>
+              <a:cs typeface="Arial" panose="020B0604020202020204" pitchFamily="34" charset="0"/>
+            </a:endParaRPr>
+          </a:p>
+        </p:txBody>
+      </p:sp>
+      <p:sp>
+        <p:nvSpPr>
+          <p:cNvPr id="3" name="Content Placeholder 2">
+            <a:extLst>
+              <a:ext uri="{FF2B5EF4-FFF2-40B4-BE49-F238E27FC236}">
+                <a16:creationId xmlns:a16="http://schemas.microsoft.com/office/drawing/2014/main" id="{2BE8F62F-78D8-49BF-8144-F97422F242FF}"/>
+              </a:ext>
+            </a:extLst>
+          </p:cNvPr>
+          <p:cNvSpPr>
+            <a:spLocks noGrp="1"/>
+          </p:cNvSpPr>
+          <p:nvPr>
+            <p:ph idx="1"/>
+          </p:nvPr>
+        </p:nvSpPr>
+        <p:spPr/>
+        <p:txBody>
+          <a:bodyPr/>
+          <a:lstStyle/>
+          <a:p>
+            <a:r>
+              <a:rPr lang="en-US" dirty="0"/>
+              <a:t>$ </a:t>
+            </a:r>
+            <a:r>
+              <a:rPr lang="en-US" dirty="0" err="1"/>
+              <a:t>readelf</a:t>
+            </a:r>
+            <a:r>
+              <a:rPr lang="en-US" dirty="0"/>
+              <a:t> –h </a:t>
+            </a:r>
+            <a:r>
+              <a:rPr lang="en-US" dirty="0" err="1"/>
+              <a:t>a.out</a:t>
+            </a:r>
+            <a:r>
+              <a:rPr lang="en-US" dirty="0"/>
+              <a:t> – </a:t>
+            </a:r>
+            <a:r>
+              <a:rPr lang="ru-RU" dirty="0"/>
+              <a:t>посмотреть </a:t>
+            </a:r>
+            <a:r>
+              <a:rPr lang="ru-RU" dirty="0" err="1"/>
+              <a:t>хэдер</a:t>
+            </a:r>
+            <a:r>
+              <a:rPr lang="ru-RU" dirty="0"/>
+              <a:t> (заголовок) исполняемого файла</a:t>
+            </a:r>
+            <a:endParaRPr lang="en-US" dirty="0"/>
+          </a:p>
+          <a:p>
+            <a:r>
+              <a:rPr lang="en-US" dirty="0"/>
+              <a:t>$ </a:t>
+            </a:r>
+            <a:r>
+              <a:rPr lang="en-US" dirty="0" err="1"/>
+              <a:t>readelf</a:t>
+            </a:r>
+            <a:r>
+              <a:rPr lang="en-US" dirty="0"/>
+              <a:t> –s </a:t>
+            </a:r>
+            <a:r>
+              <a:rPr lang="en-US" dirty="0" err="1"/>
+              <a:t>a.out</a:t>
+            </a:r>
+            <a:r>
+              <a:rPr lang="en-US" dirty="0"/>
+              <a:t> – </a:t>
+            </a:r>
+            <a:r>
+              <a:rPr lang="ru-RU" dirty="0"/>
+              <a:t>посмотреть таблицу символов</a:t>
+            </a:r>
+          </a:p>
+          <a:p>
+            <a:r>
+              <a:rPr lang="en-US" dirty="0"/>
+              <a:t>$ </a:t>
+            </a:r>
+            <a:r>
+              <a:rPr lang="en-US" dirty="0" err="1"/>
+              <a:t>objdump</a:t>
+            </a:r>
+            <a:r>
+              <a:rPr lang="en-US" dirty="0"/>
+              <a:t> –t </a:t>
+            </a:r>
+            <a:r>
+              <a:rPr lang="en-US" dirty="0" err="1"/>
+              <a:t>a.out</a:t>
+            </a:r>
+            <a:r>
+              <a:rPr lang="en-US" dirty="0"/>
+              <a:t> – </a:t>
+            </a:r>
+            <a:r>
+              <a:rPr lang="ru-RU" dirty="0"/>
+              <a:t>тоже посмотреть таблицу символов</a:t>
+            </a:r>
+          </a:p>
+          <a:p>
+            <a:r>
+              <a:rPr lang="en-US" dirty="0"/>
+              <a:t>$ </a:t>
+            </a:r>
+            <a:r>
+              <a:rPr lang="en-US" dirty="0" err="1"/>
+              <a:t>objdump</a:t>
+            </a:r>
+            <a:r>
+              <a:rPr lang="en-US" dirty="0"/>
+              <a:t> –d </a:t>
+            </a:r>
+            <a:r>
+              <a:rPr lang="en-US" dirty="0" err="1"/>
+              <a:t>a.out</a:t>
+            </a:r>
+            <a:r>
+              <a:rPr lang="en-US" dirty="0"/>
+              <a:t> – dump </a:t>
+            </a:r>
+            <a:r>
+              <a:rPr lang="ru-RU" dirty="0"/>
+              <a:t>исполняемого файла</a:t>
+            </a:r>
+          </a:p>
+          <a:p>
+            <a:r>
+              <a:rPr lang="en-US" dirty="0"/>
+              <a:t>$ nm –C </a:t>
+            </a:r>
+            <a:r>
+              <a:rPr lang="en-US" dirty="0" err="1"/>
+              <a:t>a.out</a:t>
+            </a:r>
+            <a:r>
+              <a:rPr lang="en-US" dirty="0"/>
+              <a:t> </a:t>
+            </a:r>
+            <a:r>
+              <a:rPr lang="ru-RU" dirty="0"/>
+              <a:t>– перечислить символы с </a:t>
+            </a:r>
+            <a:r>
+              <a:rPr lang="en-US" dirty="0" err="1"/>
+              <a:t>demangling</a:t>
+            </a:r>
+            <a:endParaRPr lang="ru-RU" dirty="0"/>
+          </a:p>
+        </p:txBody>
+      </p:sp>
+    </p:spTree>
+    <p:extLst>
+      <p:ext uri="{BB962C8B-B14F-4D97-AF65-F5344CB8AC3E}">
+        <p14:creationId xmlns:p14="http://schemas.microsoft.com/office/powerpoint/2010/main" val="3107492532"/>
+      </p:ext>
+    </p:extLst>
+  </p:cSld>
+  <p:clrMapOvr>
+    <a:masterClrMapping/>
+  </p:clrMapOvr>
+</p:sld>
+</file>
+
+<file path=ppt/slides/slide19.xml><?xml version="1.0" encoding="utf-8"?>
 <p:sld xmlns:a="http://schemas.openxmlformats.org/drawingml/2006/main" xmlns:r="http://schemas.openxmlformats.org/officeDocument/2006/relationships" xmlns:p="http://schemas.openxmlformats.org/presentationml/2006/main">
   <p:cSld>
     <p:spTree>
